--- a/lecons/LSA/Climatology/LSA_CLIM_L03_Solar_Radiation.pptx
+++ b/lecons/LSA/Climatology/LSA_CLIM_L03_Solar_Radiation.pptx
@@ -3021,7 +3021,7 @@
           <a:p>
             <a:r>
               <a:rPr lang="en-US" dirty="0"/>
-              <a:t>Let us copy DEFINITIONS. The key terms of this lesson are defined as follows. Write each point on a new line, with the key term first. When you finish, we go to the next slide.</a:t>
+              <a:t>Let us copy the definitions. The key terms of this lesson are defined as follows. On this slide we have Solar radiation (insolation) and Albedo. Write each point on a new line, with the key term first, and explain it in your own words when we revise. When you finish, we go to the next slide.</a:t>
             </a:r>
             <a:endParaRPr lang="en-US" dirty="0"/>
           </a:p>
@@ -3109,7 +3109,7 @@
           <a:p>
             <a:r>
               <a:rPr lang="en-US" dirty="0"/>
-              <a:t>We continue with the same part. Write each point on a new line, with the key term first.</a:t>
+              <a:t>We continue with the definitions. On this slide we have Depletion. Write each point on a new line, with the key term first, and explain it in your own words when we revise.</a:t>
             </a:r>
             <a:endParaRPr lang="en-US" dirty="0"/>
           </a:p>
@@ -3197,7 +3197,7 @@
           <a:p>
             <a:r>
               <a:rPr lang="en-US" dirty="0"/>
-              <a:t>Let us copy Sources and Nature of Solar Radiation. The source and nature of solar radiation are as follows. Write each point on a new line, with the key term first. When you finish, we go to the next slide.</a:t>
+              <a:t>Let us copy Sources and Nature of Solar Radiation. The source and nature of solar radiation are as follows. On this slide we have Source. Write each point on a new line, with the key term first, and explain it in your own words when we revise. When you finish, we go to the next slide.</a:t>
             </a:r>
             <a:endParaRPr lang="en-US" dirty="0"/>
           </a:p>
@@ -3285,7 +3285,7 @@
           <a:p>
             <a:r>
               <a:rPr lang="en-US" dirty="0"/>
-              <a:t>We continue with the same part. Write each point on a new line, with the key term first.</a:t>
+              <a:t>We continue with Sources and Nature of Solar Radiation. On this slide we have Nature and Solar constant. Write each point on a new line, with the key term first, and explain it in your own words when we revise.</a:t>
             </a:r>
             <a:endParaRPr lang="en-US" dirty="0"/>
           </a:p>
@@ -3373,7 +3373,7 @@
           <a:p>
             <a:r>
               <a:rPr lang="en-US" dirty="0"/>
-              <a:t>Let us copy Depletion of Solar Radiation. Solar radiation is intercepted by the atmosphere through the following processes. Write each point on a new line, with the key term first. When you finish, we go to the next slide.</a:t>
+              <a:t>Let us copy Depletion of Solar Radiation. Solar radiation is intercepted by the atmosphere through the following processes. On this slide we have Absorption. Write each point on a new line, with the key term first, and explain it in your own words when we revise. When you finish, we go to the next slide.</a:t>
             </a:r>
             <a:endParaRPr lang="en-US" dirty="0"/>
           </a:p>
@@ -3549,7 +3549,7 @@
           <a:p>
             <a:r>
               <a:rPr lang="en-US" dirty="0"/>
-              <a:t>We continue with the same part. Write each point on a new line, with the key term first. When you finish, we go to the next slide.</a:t>
+              <a:t>We continue with Depletion of Solar Radiation. On this slide we have Scattering. Write each point on a new line, with the key term first, and explain it in your own words when we revise. When you finish, we go to the next slide.</a:t>
             </a:r>
             <a:endParaRPr lang="en-US" dirty="0"/>
           </a:p>
@@ -3637,7 +3637,7 @@
           <a:p>
             <a:r>
               <a:rPr lang="en-US" dirty="0"/>
-              <a:t>We continue with the same part. Write each point on a new line, with the key term first.</a:t>
+              <a:t>We continue with Depletion of Solar Radiation. On this slide we have Reflection. Write each point on a new line, with the key term first, and explain it in your own words when we revise.</a:t>
             </a:r>
             <a:endParaRPr lang="en-US" dirty="0"/>
           </a:p>
@@ -3813,7 +3813,7 @@
           <a:p>
             <a:r>
               <a:rPr lang="en-US" dirty="0"/>
-              <a:t>Let us copy Albedo of Surfaces. The albedo of a surface depends on its colour and nature. Write each point on a new line, with the key term first. When you finish, we go to the next slide.</a:t>
+              <a:t>Let us copy Albedo of Surfaces. The albedo of a surface depends on its colour and nature. On this slide we have High albedo. Write each point on a new line, with the key term first, and explain it in your own words when we revise. When you finish, we go to the next slide.</a:t>
             </a:r>
             <a:endParaRPr lang="en-US" dirty="0"/>
           </a:p>
@@ -3901,7 +3901,7 @@
           <a:p>
             <a:r>
               <a:rPr lang="en-US" dirty="0"/>
-              <a:t>We continue with the same part. Write each point on a new line, with the key term first.</a:t>
+              <a:t>We continue with Albedo of Surfaces. On this slide we have Low albedo. Write each point on a new line, with the key term first, and explain it in your own words when we revise.</a:t>
             </a:r>
             <a:endParaRPr lang="en-US" dirty="0"/>
           </a:p>
@@ -5133,7 +5133,7 @@
           <a:p>
             <a:r>
               <a:rPr lang="en-US" dirty="0"/>
-              <a:t>Here is the plan of our lesson today. We shall correction of the homework; then objectives and recall; then real-life situation and action to take; then learning activities; then board summary; then evaluation, remediation and homework.</a:t>
+              <a:t>Here is the plan of our lesson today. First, we shall correct the homework. Then we shall look at the objectives and recall what you already know. After that, we shall study a situation from real life and the action to take, and do the learning activities. Finally, we shall copy the board summary, do the evaluation and the remediation, and I will give you the homework.</a:t>
             </a:r>
             <a:endParaRPr lang="en-US" dirty="0"/>
           </a:p>
@@ -6673,7 +6673,7 @@
                 <a:ea typeface="Times New Roman" pitchFamily="34" charset="-122"/>
                 <a:cs typeface="Times New Roman" pitchFamily="34" charset="-120"/>
               </a:rPr>
-              <a:t>Lesson 3: Solar Radiation</a:t>
+              <a:t>Lesson 3</a:t>
             </a:r>
             <a:endParaRPr lang="en-US" sz="2600" dirty="0"/>
           </a:p>
